--- a/ゲーム科1年/01_後期/ゲーム制作実習Ⅰ/バージョン管理/04_CommitとPush.pptx
+++ b/ゲーム科1年/01_後期/ゲーム制作実習Ⅰ/バージョン管理/04_CommitとPush.pptx
@@ -266,7 +266,7 @@
           <a:p>
             <a:fld id="{E9CC885B-4903-4D54-9A93-00025F12DED9}" type="datetimeFigureOut">
               <a:rPr kumimoji="1" lang="ja-JP" altLang="en-US" smtClean="0"/>
-              <a:t>2026/1/14</a:t>
+              <a:t>2026/1/15</a:t>
             </a:fld>
             <a:endParaRPr kumimoji="1" lang="ja-JP" altLang="en-US"/>
           </a:p>
@@ -496,7 +496,7 @@
           <a:p>
             <a:fld id="{E9CC885B-4903-4D54-9A93-00025F12DED9}" type="datetimeFigureOut">
               <a:rPr kumimoji="1" lang="ja-JP" altLang="en-US" smtClean="0"/>
-              <a:t>2026/1/14</a:t>
+              <a:t>2026/1/15</a:t>
             </a:fld>
             <a:endParaRPr kumimoji="1" lang="ja-JP" altLang="en-US"/>
           </a:p>
@@ -736,7 +736,7 @@
           <a:p>
             <a:fld id="{E9CC885B-4903-4D54-9A93-00025F12DED9}" type="datetimeFigureOut">
               <a:rPr kumimoji="1" lang="ja-JP" altLang="en-US" smtClean="0"/>
-              <a:t>2026/1/14</a:t>
+              <a:t>2026/1/15</a:t>
             </a:fld>
             <a:endParaRPr kumimoji="1" lang="ja-JP" altLang="en-US"/>
           </a:p>
@@ -966,7 +966,7 @@
           <a:p>
             <a:fld id="{E9CC885B-4903-4D54-9A93-00025F12DED9}" type="datetimeFigureOut">
               <a:rPr kumimoji="1" lang="ja-JP" altLang="en-US" smtClean="0"/>
-              <a:t>2026/1/14</a:t>
+              <a:t>2026/1/15</a:t>
             </a:fld>
             <a:endParaRPr kumimoji="1" lang="ja-JP" altLang="en-US"/>
           </a:p>
@@ -1241,7 +1241,7 @@
           <a:p>
             <a:fld id="{E9CC885B-4903-4D54-9A93-00025F12DED9}" type="datetimeFigureOut">
               <a:rPr kumimoji="1" lang="ja-JP" altLang="en-US" smtClean="0"/>
-              <a:t>2026/1/14</a:t>
+              <a:t>2026/1/15</a:t>
             </a:fld>
             <a:endParaRPr kumimoji="1" lang="ja-JP" altLang="en-US"/>
           </a:p>
@@ -1570,7 +1570,7 @@
           <a:p>
             <a:fld id="{E9CC885B-4903-4D54-9A93-00025F12DED9}" type="datetimeFigureOut">
               <a:rPr kumimoji="1" lang="ja-JP" altLang="en-US" smtClean="0"/>
-              <a:t>2026/1/14</a:t>
+              <a:t>2026/1/15</a:t>
             </a:fld>
             <a:endParaRPr kumimoji="1" lang="ja-JP" altLang="en-US"/>
           </a:p>
@@ -2046,7 +2046,7 @@
           <a:p>
             <a:fld id="{E9CC885B-4903-4D54-9A93-00025F12DED9}" type="datetimeFigureOut">
               <a:rPr kumimoji="1" lang="ja-JP" altLang="en-US" smtClean="0"/>
-              <a:t>2026/1/14</a:t>
+              <a:t>2026/1/15</a:t>
             </a:fld>
             <a:endParaRPr kumimoji="1" lang="ja-JP" altLang="en-US"/>
           </a:p>
@@ -2187,7 +2187,7 @@
           <a:p>
             <a:fld id="{E9CC885B-4903-4D54-9A93-00025F12DED9}" type="datetimeFigureOut">
               <a:rPr kumimoji="1" lang="ja-JP" altLang="en-US" smtClean="0"/>
-              <a:t>2026/1/14</a:t>
+              <a:t>2026/1/15</a:t>
             </a:fld>
             <a:endParaRPr kumimoji="1" lang="ja-JP" altLang="en-US"/>
           </a:p>
@@ -2300,7 +2300,7 @@
           <a:p>
             <a:fld id="{E9CC885B-4903-4D54-9A93-00025F12DED9}" type="datetimeFigureOut">
               <a:rPr kumimoji="1" lang="ja-JP" altLang="en-US" smtClean="0"/>
-              <a:t>2026/1/14</a:t>
+              <a:t>2026/1/15</a:t>
             </a:fld>
             <a:endParaRPr kumimoji="1" lang="ja-JP" altLang="en-US"/>
           </a:p>
@@ -2643,7 +2643,7 @@
           <a:p>
             <a:fld id="{E9CC885B-4903-4D54-9A93-00025F12DED9}" type="datetimeFigureOut">
               <a:rPr kumimoji="1" lang="ja-JP" altLang="en-US" smtClean="0"/>
-              <a:t>2026/1/14</a:t>
+              <a:t>2026/1/15</a:t>
             </a:fld>
             <a:endParaRPr kumimoji="1" lang="ja-JP" altLang="en-US"/>
           </a:p>
@@ -2931,7 +2931,7 @@
           <a:p>
             <a:fld id="{E9CC885B-4903-4D54-9A93-00025F12DED9}" type="datetimeFigureOut">
               <a:rPr kumimoji="1" lang="ja-JP" altLang="en-US" smtClean="0"/>
-              <a:t>2026/1/14</a:t>
+              <a:t>2026/1/15</a:t>
             </a:fld>
             <a:endParaRPr kumimoji="1" lang="ja-JP" altLang="en-US"/>
           </a:p>
@@ -3204,7 +3204,7 @@
           <a:p>
             <a:fld id="{E9CC885B-4903-4D54-9A93-00025F12DED9}" type="datetimeFigureOut">
               <a:rPr kumimoji="1" lang="ja-JP" altLang="en-US" smtClean="0"/>
-              <a:t>2026/1/14</a:t>
+              <a:t>2026/1/15</a:t>
             </a:fld>
             <a:endParaRPr kumimoji="1" lang="ja-JP" altLang="en-US"/>
           </a:p>
@@ -4029,7 +4029,7 @@
         <p:spPr>
           <a:xfrm>
             <a:off x="567542" y="1216429"/>
-            <a:ext cx="11750333" cy="830997"/>
+            <a:ext cx="11750333" cy="1569660"/>
           </a:xfrm>
           <a:prstGeom prst="rect">
             <a:avLst/>
@@ -4062,6 +4062,28 @@
               <a:rPr lang="ja-JP" altLang="en-US" sz="2400" dirty="0"/>
               <a:t>という機能があります。</a:t>
             </a:r>
+            <a:endParaRPr lang="en-US" altLang="ja-JP" sz="2400" dirty="0"/>
+          </a:p>
+          <a:p>
+            <a:r>
+              <a:rPr lang="ja-JP" altLang="en-US" sz="2400" dirty="0"/>
+              <a:t>ファイルを追加したり編集した状況を</a:t>
+            </a:r>
+            <a:r>
+              <a:rPr lang="ja-JP" altLang="en-US" sz="2400" b="1" dirty="0">
+                <a:solidFill>
+                  <a:srgbClr val="FF0000"/>
+                </a:solidFill>
+              </a:rPr>
+              <a:t>セーブ</a:t>
+            </a:r>
+            <a:r>
+              <a:rPr lang="ja-JP" altLang="en-US" sz="2400" dirty="0"/>
+              <a:t>するものになります。</a:t>
+            </a:r>
+            <a:endParaRPr lang="en-US" altLang="ja-JP" sz="2400" dirty="0"/>
+          </a:p>
+          <a:p>
             <a:endParaRPr lang="en-US" altLang="ja-JP" sz="2400" dirty="0"/>
           </a:p>
           <a:p>
@@ -5530,7 +5552,7 @@
         </p:blipFill>
         <p:spPr>
           <a:xfrm>
-            <a:off x="567543" y="3295121"/>
+            <a:off x="5605709" y="3370404"/>
             <a:ext cx="5169870" cy="3314729"/>
           </a:xfrm>
           <a:prstGeom prst="rect">
@@ -5552,7 +5574,7 @@
         </p:nvSpPr>
         <p:spPr>
           <a:xfrm>
-            <a:off x="1302648" y="4903694"/>
+            <a:off x="6340814" y="4978977"/>
             <a:ext cx="4434765" cy="215153"/>
           </a:xfrm>
           <a:prstGeom prst="rect">
@@ -5562,6 +5584,90 @@
           <a:ln w="38100">
             <a:solidFill>
               <a:srgbClr val="FF0000"/>
+            </a:solidFill>
+          </a:ln>
+        </p:spPr>
+        <p:style>
+          <a:lnRef idx="2">
+            <a:schemeClr val="accent1">
+              <a:shade val="50000"/>
+            </a:schemeClr>
+          </a:lnRef>
+          <a:fillRef idx="1">
+            <a:schemeClr val="accent1"/>
+          </a:fillRef>
+          <a:effectRef idx="0">
+            <a:schemeClr val="accent1"/>
+          </a:effectRef>
+          <a:fontRef idx="minor">
+            <a:schemeClr val="lt1"/>
+          </a:fontRef>
+        </p:style>
+        <p:txBody>
+          <a:bodyPr rtlCol="0" anchor="ctr"/>
+          <a:lstStyle/>
+          <a:p>
+            <a:pPr algn="ctr"/>
+            <a:endParaRPr kumimoji="1" lang="ja-JP" altLang="en-US"/>
+          </a:p>
+        </p:txBody>
+      </p:sp>
+      <p:pic>
+        <p:nvPicPr>
+          <p:cNvPr id="3" name="図 2">
+            <a:extLst>
+              <a:ext uri="{FF2B5EF4-FFF2-40B4-BE49-F238E27FC236}">
+                <a16:creationId xmlns:a16="http://schemas.microsoft.com/office/drawing/2014/main" id="{ACB556CB-6DA2-4483-B6AD-81456DC1F8FC}"/>
+              </a:ext>
+            </a:extLst>
+          </p:cNvPr>
+          <p:cNvPicPr>
+            <a:picLocks noChangeAspect="1"/>
+          </p:cNvPicPr>
+          <p:nvPr/>
+        </p:nvPicPr>
+        <p:blipFill>
+          <a:blip r:embed="rId3"/>
+          <a:stretch>
+            <a:fillRect/>
+          </a:stretch>
+        </p:blipFill>
+        <p:spPr>
+          <a:xfrm>
+            <a:off x="684084" y="3155421"/>
+            <a:ext cx="2721585" cy="3562879"/>
+          </a:xfrm>
+          <a:prstGeom prst="rect">
+            <a:avLst/>
+          </a:prstGeom>
+        </p:spPr>
+      </p:pic>
+      <p:sp>
+        <p:nvSpPr>
+          <p:cNvPr id="9" name="矢印: 右 8">
+            <a:extLst>
+              <a:ext uri="{FF2B5EF4-FFF2-40B4-BE49-F238E27FC236}">
+                <a16:creationId xmlns:a16="http://schemas.microsoft.com/office/drawing/2014/main" id="{5A279F08-1BD2-48E9-87B6-8494CFA2FDC4}"/>
+              </a:ext>
+            </a:extLst>
+          </p:cNvPr>
+          <p:cNvSpPr/>
+          <p:nvPr/>
+        </p:nvSpPr>
+        <p:spPr>
+          <a:xfrm rot="13297314">
+            <a:off x="2391581" y="3272817"/>
+            <a:ext cx="377504" cy="312366"/>
+          </a:xfrm>
+          <a:prstGeom prst="rightArrow">
+            <a:avLst/>
+          </a:prstGeom>
+          <a:solidFill>
+            <a:srgbClr val="FF0000"/>
+          </a:solidFill>
+          <a:ln w="38100">
+            <a:solidFill>
+              <a:schemeClr val="tx1"/>
             </a:solidFill>
           </a:ln>
         </p:spPr>
